--- a/Analyzing Amazon Sales data.pptx
+++ b/Analyzing Amazon Sales data.pptx
@@ -305,7 +305,7 @@
           <a:p>
             <a:fld id="{88D38747-4367-4BD2-8D51-C97E202738E2}" type="datetime1">
               <a:rPr lang="en-US" smtClean="0"/>
-              <a:t>8/16/2024</a:t>
+              <a:t>9/21/2025</a:t>
             </a:fld>
             <a:endParaRPr lang="en-US" dirty="0"/>
           </a:p>
@@ -610,7 +610,7 @@
           <a:p>
             <a:fld id="{11F1B079-7EF0-44EE-B798-BCC497C9F3B2}" type="datetime1">
               <a:rPr lang="en-US" smtClean="0"/>
-              <a:t>8/16/2024</a:t>
+              <a:t>9/21/2025</a:t>
             </a:fld>
             <a:endParaRPr lang="en-US" dirty="0"/>
           </a:p>
@@ -804,7 +804,7 @@
           <a:p>
             <a:fld id="{28FF70A8-1D13-4657-95F0-A9EA54967B8D}" type="datetime1">
               <a:rPr lang="en-US" smtClean="0"/>
-              <a:t>8/16/2024</a:t>
+              <a:t>9/21/2025</a:t>
             </a:fld>
             <a:endParaRPr lang="en-US" dirty="0"/>
           </a:p>
@@ -1067,7 +1067,7 @@
           <a:p>
             <a:fld id="{21EB90AC-71BD-4C7F-8ACA-7B3F18292E63}" type="datetime1">
               <a:rPr lang="en-US" smtClean="0"/>
-              <a:t>8/16/2024</a:t>
+              <a:t>9/21/2025</a:t>
             </a:fld>
             <a:endParaRPr lang="en-US" dirty="0"/>
           </a:p>
@@ -1503,7 +1503,7 @@
           <a:p>
             <a:fld id="{4E6EFC2C-8905-46F0-B443-CE905B76BA01}" type="datetime1">
               <a:rPr lang="en-US" smtClean="0"/>
-              <a:t>8/16/2024</a:t>
+              <a:t>9/21/2025</a:t>
             </a:fld>
             <a:endParaRPr lang="en-US" dirty="0"/>
           </a:p>
@@ -2040,7 +2040,7 @@
           <a:p>
             <a:fld id="{D9079DC3-C9B5-499E-9140-0DC28B7074E2}" type="datetime1">
               <a:rPr lang="en-US" smtClean="0"/>
-              <a:t>8/16/2024</a:t>
+              <a:t>9/21/2025</a:t>
             </a:fld>
             <a:endParaRPr lang="en-US" dirty="0"/>
           </a:p>
@@ -2922,7 +2922,7 @@
           <a:p>
             <a:fld id="{30BB33EA-E472-4D22-9C03-A9C14AA21CED}" type="datetime1">
               <a:rPr lang="en-US" smtClean="0"/>
-              <a:t>8/16/2024</a:t>
+              <a:t>9/21/2025</a:t>
             </a:fld>
             <a:endParaRPr lang="en-US" dirty="0"/>
           </a:p>
@@ -3092,7 +3092,7 @@
           <a:p>
             <a:fld id="{217E833E-1B6D-415F-AD29-75AE8C43BD0D}" type="datetime1">
               <a:rPr lang="en-US" smtClean="0"/>
-              <a:t>8/16/2024</a:t>
+              <a:t>9/21/2025</a:t>
             </a:fld>
             <a:endParaRPr lang="en-US" dirty="0"/>
           </a:p>
@@ -3276,7 +3276,7 @@
           <a:p>
             <a:fld id="{8452596F-08A7-4B70-989A-F2B1CF31E66B}" type="datetime1">
               <a:rPr lang="en-US" smtClean="0"/>
-              <a:t>8/16/2024</a:t>
+              <a:t>9/21/2025</a:t>
             </a:fld>
             <a:endParaRPr lang="en-US" dirty="0"/>
           </a:p>
@@ -3446,7 +3446,7 @@
           <a:p>
             <a:fld id="{73C55A3C-5767-4844-A0A3-83778C2E5409}" type="datetime1">
               <a:rPr lang="en-US" smtClean="0"/>
-              <a:t>8/16/2024</a:t>
+              <a:t>9/21/2025</a:t>
             </a:fld>
             <a:endParaRPr lang="en-US" dirty="0"/>
           </a:p>
@@ -3690,7 +3690,7 @@
           <a:p>
             <a:fld id="{CAE507A8-A5CF-4D38-AB86-7EDDA87A85D4}" type="datetime1">
               <a:rPr lang="en-US" smtClean="0"/>
-              <a:t>8/16/2024</a:t>
+              <a:t>9/21/2025</a:t>
             </a:fld>
             <a:endParaRPr lang="en-US" dirty="0"/>
           </a:p>
@@ -3932,7 +3932,7 @@
           <a:p>
             <a:fld id="{BDFCD27C-8599-43EF-BA1D-14DDC1946E06}" type="datetime1">
               <a:rPr lang="en-US" smtClean="0"/>
-              <a:t>8/16/2024</a:t>
+              <a:t>9/21/2025</a:t>
             </a:fld>
             <a:endParaRPr lang="en-US" dirty="0"/>
           </a:p>
@@ -4415,7 +4415,7 @@
           <a:p>
             <a:fld id="{49343D99-809A-49C0-96E5-4250D0B498EE}" type="datetime1">
               <a:rPr lang="en-US" smtClean="0"/>
-              <a:t>8/16/2024</a:t>
+              <a:t>9/21/2025</a:t>
             </a:fld>
             <a:endParaRPr lang="en-US" dirty="0"/>
           </a:p>
@@ -4533,7 +4533,7 @@
           <a:p>
             <a:fld id="{A143DE9B-B678-4EFB-BB7D-A4370204A0B0}" type="datetime1">
               <a:rPr lang="en-US" smtClean="0"/>
-              <a:t>8/16/2024</a:t>
+              <a:t>9/21/2025</a:t>
             </a:fld>
             <a:endParaRPr lang="en-US" dirty="0"/>
           </a:p>
@@ -4628,7 +4628,7 @@
           <a:p>
             <a:fld id="{E68812DA-F765-4142-A6A3-A8ED7235E082}" type="datetime1">
               <a:rPr lang="en-US" smtClean="0"/>
-              <a:t>8/16/2024</a:t>
+              <a:t>9/21/2025</a:t>
             </a:fld>
             <a:endParaRPr lang="en-US" dirty="0"/>
           </a:p>
@@ -4883,7 +4883,7 @@
           <a:p>
             <a:fld id="{3E0277FD-7DE6-41D4-930D-AC99F5AFE54E}" type="datetime1">
               <a:rPr lang="en-US" smtClean="0"/>
-              <a:t>8/16/2024</a:t>
+              <a:t>9/21/2025</a:t>
             </a:fld>
             <a:endParaRPr lang="en-US" dirty="0"/>
           </a:p>
@@ -5190,7 +5190,7 @@
           <a:p>
             <a:fld id="{9EA15526-7079-4B7B-987C-1B5FAE11A0FF}" type="datetime1">
               <a:rPr lang="en-US" smtClean="0"/>
-              <a:t>8/16/2024</a:t>
+              <a:t>9/21/2025</a:t>
             </a:fld>
             <a:endParaRPr lang="en-US" dirty="0"/>
           </a:p>
@@ -5425,7 +5425,7 @@
           <a:p>
             <a:fld id="{073ED0CC-082F-4160-86E5-0D6041F12778}" type="datetime1">
               <a:rPr lang="en-US" smtClean="0"/>
-              <a:t>8/16/2024</a:t>
+              <a:t>9/21/2025</a:t>
             </a:fld>
             <a:endParaRPr lang="en-US" dirty="0"/>
           </a:p>
